--- a/ai-engineering/02-context-engineering/slides/context-engineering.pptx
+++ b/ai-engineering/02-context-engineering/slides/context-engineering.pptx
@@ -20155,7 +20155,7 @@
       </p:sp>
       <p:pic>
         <p:nvPicPr>
-          <p:cNvPr id="14" name="Picture 13" descr="li-ai-agents-in-depth-fig3-14-6569775941192629621.png"/>
+          <p:cNvPr id="14" name="Picture 13" descr="li-ai-agents-in-depth-fig3-14-3402617745585557241.png"/>
           <p:cNvPicPr>
             <a:picLocks noChangeAspect="1"/>
           </p:cNvPicPr>
@@ -27375,7 +27375,7 @@
       </p:sp>
       <p:pic>
         <p:nvPicPr>
-          <p:cNvPr id="14" name="Picture 13" descr="li-ai-agents-in-depth-fig3-3-5465855166659669501-2849450223546081379.jpg"/>
+          <p:cNvPr id="14" name="Picture 13" descr="li-ai-agents-in-depth-fig3-3-2666837923366624324-6351090453575986695.jpg"/>
           <p:cNvPicPr>
             <a:picLocks noChangeAspect="1"/>
           </p:cNvPicPr>
@@ -54065,7 +54065,7 @@
       </p:sp>
       <p:pic>
         <p:nvPicPr>
-          <p:cNvPr id="14" name="Picture 13" descr="li-ai-agents-in-depth-fig2-1-1192035436665506299-6960832620852118009.jpg"/>
+          <p:cNvPr id="14" name="Picture 13" descr="li-ai-agents-in-depth-fig2-1-1584880174707386639-1385495245000467918.jpg"/>
           <p:cNvPicPr>
             <a:picLocks noChangeAspect="1"/>
           </p:cNvPicPr>
@@ -57551,7 +57551,7 @@
       </p:sp>
       <p:pic>
         <p:nvPicPr>
-          <p:cNvPr id="14" name="Picture 13" descr="li-ai-agents-in-depth-fig2-10-9206175741661109185.png"/>
+          <p:cNvPr id="14" name="Picture 13" descr="li-ai-agents-in-depth-fig2-10-8390913989351164476.png"/>
           <p:cNvPicPr>
             <a:picLocks noChangeAspect="1"/>
           </p:cNvPicPr>
